--- a/lecons/USA/Economic Geography/09_USA_ECO_L08_Agricultural_Improvements_The_Green_Revolution.pptx
+++ b/lecons/USA/Economic Geography/09_USA_ECO_L08_Agricultural_Improvements_The_Green_Revolution.pptx
@@ -13202,7 +13202,7 @@
               <a:buNone/>
             </a:pPr>
             <a:r>
-              <a:rPr lang="en-US" sz="4000" b="1" dirty="0">
+              <a:rPr lang="en-US" sz="3200" b="1" dirty="0">
                 <a:solidFill>
                   <a:srgbClr val="111111"/>
                 </a:solidFill>
@@ -13212,7 +13212,7 @@
               </a:rPr>
               <a:t>Topic: Developments in Agriculture</a:t>
             </a:r>
-            <a:endParaRPr lang="en-US" sz="4000" dirty="0"/>
+            <a:endParaRPr lang="en-US" sz="3200" dirty="0"/>
           </a:p>
           <a:p>
             <a:pPr algn="l" indent="0" marL="0">
@@ -13222,7 +13222,7 @@
               <a:buNone/>
             </a:pPr>
             <a:r>
-              <a:rPr lang="en-US" sz="4000" b="1" dirty="0">
+              <a:rPr lang="en-US" sz="3200" b="1" dirty="0">
                 <a:solidFill>
                   <a:srgbClr val="111111"/>
                 </a:solidFill>
@@ -13232,7 +13232,7 @@
               </a:rPr>
               <a:t>Sub-topic: Developments in Agriculture</a:t>
             </a:r>
-            <a:endParaRPr lang="en-US" sz="4000" dirty="0"/>
+            <a:endParaRPr lang="en-US" sz="3200" dirty="0"/>
           </a:p>
           <a:p>
             <a:pPr algn="l" indent="0" marL="0">
@@ -13242,7 +13242,7 @@
               <a:buNone/>
             </a:pPr>
             <a:r>
-              <a:rPr lang="en-US" sz="4000" b="1" dirty="0">
+              <a:rPr lang="en-US" sz="3200" b="1" dirty="0">
                 <a:solidFill>
                   <a:srgbClr val="990011"/>
                 </a:solidFill>
@@ -13252,7 +13252,7 @@
               </a:rPr>
               <a:t>Lesson 8: Agricultural Improvements: The Green Revolution</a:t>
             </a:r>
-            <a:endParaRPr lang="en-US" sz="4000" dirty="0"/>
+            <a:endParaRPr lang="en-US" sz="3200" dirty="0"/>
           </a:p>
         </p:txBody>
       </p:sp>
